--- a/content/decks/media-studies/media-studies-s1-lesson-05-mise-en-scene.pptx
+++ b/content/decks/media-studies/media-studies-s1-lesson-05-mise-en-scene.pptx
@@ -1305,7 +1305,7 @@
           <a:p>
             <a:r>
               <a:rPr lang="en-US" dirty="0"/>
-              <a:t>Read it as a design brief: where is this, what is everyone wearing and why, which objects are load-bearing, and who does the arrangement of the room privilege. Then ask the same four questions of their own opening.</a:t>
+              <a:t>Read it as a design brief: where is this, what is everyone wearing and why, which objects are load-bearing, and who does the arrangement of the room privilege. Then ask the same four questions of their own opening. Every element in the frame was built or placed; nothing was found.</a:t>
             </a:r>
             <a:endParaRPr lang="en-US" dirty="0"/>
           </a:p>
@@ -6202,6 +6202,13 @@
 <file path=ppt/slides/slide7.xml><?xml version="1.0" encoding="utf-8"?>
 <p:sld xmlns:a="http://schemas.openxmlformats.org/drawingml/2006/main" xmlns:r="http://schemas.openxmlformats.org/officeDocument/2006/relationships" xmlns:p="http://schemas.openxmlformats.org/presentationml/2006/main">
   <p:cSld name="Slide 7">
+    <p:bg>
+      <p:bgPr>
+        <a:solidFill>
+          <a:srgbClr val="FAF8F1"/>
+        </a:solidFill>
+      </p:bgPr>
+    </p:bg>
     <p:spTree>
       <p:nvGrpSpPr>
         <p:cNvPr id="1" name=""/>
@@ -6216,9 +6223,135 @@
           <a:chExt cx="0" cy="0"/>
         </a:xfrm>
       </p:grpSpPr>
+      <p:sp>
+        <p:nvSpPr>
+          <p:cNvPr id="2" name="Text 0"/>
+          <p:cNvSpPr/>
+          <p:nvPr/>
+        </p:nvSpPr>
+        <p:spPr>
+          <a:xfrm>
+            <a:off x="822960" y="457200"/>
+            <a:ext cx="6400800" cy="274320"/>
+          </a:xfrm>
+          <a:prstGeom prst="rect">
+            <a:avLst/>
+          </a:prstGeom>
+          <a:noFill/>
+          <a:ln/>
+        </p:spPr>
+        <p:txBody>
+          <a:bodyPr wrap="square" lIns="0" tIns="0" rIns="0" bIns="0" rtlCol="0" anchor="ctr"/>
+          <a:lstStyle/>
+          <a:p>
+            <a:pPr algn="l" indent="0" marL="0">
+              <a:buNone/>
+            </a:pPr>
+            <a:r>
+              <a:rPr lang="en-US" sz="1100" b="1" spc="250" kern="0" dirty="0">
+                <a:solidFill>
+                  <a:srgbClr val="4A6B5D"/>
+                </a:solidFill>
+                <a:latin typeface="Arial" pitchFamily="34" charset="0"/>
+                <a:ea typeface="Arial" pitchFamily="34" charset="-122"/>
+                <a:cs typeface="Arial" pitchFamily="34" charset="-120"/>
+              </a:rPr>
+              <a:t>PRODUCTION DESIGN</a:t>
+            </a:r>
+            <a:endParaRPr lang="en-US" sz="1100" dirty="0"/>
+          </a:p>
+        </p:txBody>
+      </p:sp>
+      <p:sp>
+        <p:nvSpPr>
+          <p:cNvPr id="3" name="Text 1"/>
+          <p:cNvSpPr/>
+          <p:nvPr/>
+        </p:nvSpPr>
+        <p:spPr>
+          <a:xfrm>
+            <a:off x="6793992" y="457200"/>
+            <a:ext cx="4572000" cy="274320"/>
+          </a:xfrm>
+          <a:prstGeom prst="rect">
+            <a:avLst/>
+          </a:prstGeom>
+          <a:noFill/>
+          <a:ln/>
+        </p:spPr>
+        <p:txBody>
+          <a:bodyPr wrap="square" lIns="0" tIns="0" rIns="0" bIns="0" rtlCol="0" anchor="ctr"/>
+          <a:lstStyle/>
+          <a:p>
+            <a:pPr algn="r" indent="0" marL="0">
+              <a:buNone/>
+            </a:pPr>
+            <a:r>
+              <a:rPr lang="en-US" sz="1100" b="1" spc="250" kern="0" dirty="0">
+                <a:solidFill>
+                  <a:srgbClr val="7A7F72"/>
+                </a:solidFill>
+                <a:latin typeface="Arial" pitchFamily="34" charset="0"/>
+                <a:ea typeface="Arial" pitchFamily="34" charset="-122"/>
+                <a:cs typeface="Arial" pitchFamily="34" charset="-120"/>
+              </a:rPr>
+              <a:t>EVERYTHING AT ONCE, ALL OF IT CHOSEN</a:t>
+            </a:r>
+            <a:endParaRPr lang="en-US" sz="1100" dirty="0"/>
+          </a:p>
+        </p:txBody>
+      </p:sp>
+      <p:sp>
+        <p:nvSpPr>
+          <p:cNvPr id="4" name="Shape 2"/>
+          <p:cNvSpPr/>
+          <p:nvPr/>
+        </p:nvSpPr>
+        <p:spPr>
+          <a:xfrm>
+            <a:off x="822960" y="786384"/>
+            <a:ext cx="10543032" cy="0"/>
+          </a:xfrm>
+          <a:prstGeom prst="line">
+            <a:avLst/>
+          </a:prstGeom>
+          <a:noFill/>
+          <a:ln w="9525">
+            <a:solidFill>
+              <a:srgbClr val="D9D4C4"/>
+            </a:solidFill>
+            <a:prstDash val="solid"/>
+          </a:ln>
+        </p:spPr>
+      </p:sp>
+      <p:sp>
+        <p:nvSpPr>
+          <p:cNvPr id="5" name="Shape 3"/>
+          <p:cNvSpPr/>
+          <p:nvPr/>
+        </p:nvSpPr>
+        <p:spPr>
+          <a:xfrm>
+            <a:off x="822960" y="1005840"/>
+            <a:ext cx="10543032" cy="3429000"/>
+          </a:xfrm>
+          <a:prstGeom prst="rect">
+            <a:avLst/>
+          </a:prstGeom>
+          <a:solidFill>
+            <a:srgbClr val="FAF8F1"/>
+          </a:solidFill>
+          <a:ln w="9525">
+            <a:solidFill>
+              <a:srgbClr val="D9D4C4"/>
+            </a:solidFill>
+            <a:prstDash val="solid"/>
+          </a:ln>
+        </p:spPr>
+      </p:sp>
       <p:pic>
         <p:nvPicPr>
-          <p:cNvPr id="2" name="Image 0" descr="/Users/dogan/Documents/Vaults/Courses/wiki/classes/media-studies/decks/_build/img/crops/bruegel-wedding_a1777.jpg">    </p:cNvPr>
+          <p:cNvPr id="6" name="Image 0" descr="/Users/dogan/Documents/Vaults/Courses/wiki/classes/media-studies/decks/_build/img/gbh-concierge.jpg">    </p:cNvPr>
           <p:cNvPicPr>
             <a:picLocks noChangeAspect="1"/>
           </p:cNvPicPr>
@@ -6232,8 +6365,8 @@
         </p:blipFill>
         <p:spPr>
           <a:xfrm>
-            <a:off x="0" y="0"/>
-            <a:ext cx="12188952" cy="6858000"/>
+            <a:off x="2417634" y="1133856"/>
+            <a:ext cx="7353684" cy="3172968"/>
           </a:xfrm>
           <a:prstGeom prst="rect">
             <a:avLst/>
@@ -6242,116 +6375,92 @@
       </p:pic>
       <p:sp>
         <p:nvSpPr>
-          <p:cNvPr id="3" name="Shape 0"/>
-          <p:cNvSpPr/>
-          <p:nvPr/>
-        </p:nvSpPr>
-        <p:spPr>
-          <a:xfrm>
-            <a:off x="502920" y="502920"/>
-            <a:ext cx="5120640" cy="502920"/>
-          </a:xfrm>
-          <a:prstGeom prst="rect">
-            <a:avLst/>
-          </a:prstGeom>
-          <a:solidFill>
-            <a:srgbClr val="FAF8F1"/>
-          </a:solidFill>
-          <a:ln/>
-        </p:spPr>
-      </p:sp>
-      <p:sp>
-        <p:nvSpPr>
-          <p:cNvPr id="4" name="Text 1"/>
-          <p:cNvSpPr/>
-          <p:nvPr/>
-        </p:nvSpPr>
-        <p:spPr>
-          <a:xfrm>
-            <a:off x="704088" y="521208"/>
-            <a:ext cx="4846320" cy="274320"/>
-          </a:xfrm>
-          <a:prstGeom prst="rect">
-            <a:avLst/>
-          </a:prstGeom>
-          <a:noFill/>
-          <a:ln/>
-        </p:spPr>
-        <p:txBody>
-          <a:bodyPr wrap="square" lIns="0" tIns="0" rIns="0" bIns="0" rtlCol="0" anchor="ctr"/>
-          <a:lstStyle/>
-          <a:p>
-            <a:pPr algn="l" indent="0" marL="0">
-              <a:buNone/>
-            </a:pPr>
-            <a:r>
-              <a:rPr lang="en-US" sz="1100" b="1" spc="250" kern="0" dirty="0">
-                <a:solidFill>
-                  <a:srgbClr val="4A6B5D"/>
+          <p:cNvPr id="7" name="Text 4"/>
+          <p:cNvSpPr/>
+          <p:nvPr/>
+        </p:nvSpPr>
+        <p:spPr>
+          <a:xfrm>
+            <a:off x="822960" y="4462272"/>
+            <a:ext cx="10543032" cy="274320"/>
+          </a:xfrm>
+          <a:prstGeom prst="rect">
+            <a:avLst/>
+          </a:prstGeom>
+          <a:noFill/>
+          <a:ln/>
+        </p:spPr>
+        <p:txBody>
+          <a:bodyPr wrap="square" lIns="0" tIns="0" rIns="0" bIns="0" rtlCol="0" anchor="ctr"/>
+          <a:lstStyle/>
+          <a:p>
+            <a:pPr algn="ctr" indent="0" marL="0">
+              <a:buNone/>
+            </a:pPr>
+            <a:r>
+              <a:rPr lang="en-US" sz="950" dirty="0">
+                <a:solidFill>
+                  <a:srgbClr val="7A7F72"/>
                 </a:solidFill>
                 <a:latin typeface="Arial" pitchFamily="34" charset="0"/>
                 <a:ea typeface="Arial" pitchFamily="34" charset="-122"/>
                 <a:cs typeface="Arial" pitchFamily="34" charset="-120"/>
               </a:rPr>
-              <a:t>PRODUCTION DESIGN · EVERYTHING AT ONCE</a:t>
-            </a:r>
-            <a:endParaRPr lang="en-US" sz="1100" dirty="0"/>
-          </a:p>
-        </p:txBody>
-      </p:sp>
-      <p:sp>
-        <p:nvSpPr>
-          <p:cNvPr id="5" name="Shape 2"/>
-          <p:cNvSpPr/>
-          <p:nvPr/>
-        </p:nvSpPr>
-        <p:spPr>
-          <a:xfrm>
-            <a:off x="457200" y="5230368"/>
-            <a:ext cx="8778240" cy="1243584"/>
-          </a:xfrm>
-          <a:prstGeom prst="rect">
-            <a:avLst/>
-          </a:prstGeom>
-          <a:solidFill>
-            <a:srgbClr val="FAF8F1"/>
-          </a:solidFill>
-          <a:ln/>
-        </p:spPr>
-      </p:sp>
-      <p:sp>
-        <p:nvSpPr>
-          <p:cNvPr id="6" name="Shape 3"/>
-          <p:cNvSpPr/>
-          <p:nvPr/>
-        </p:nvSpPr>
-        <p:spPr>
-          <a:xfrm>
-            <a:off x="676656" y="5468112"/>
-            <a:ext cx="731520" cy="0"/>
-          </a:xfrm>
-          <a:prstGeom prst="line">
-            <a:avLst/>
-          </a:prstGeom>
-          <a:noFill/>
-          <a:ln w="28575">
-            <a:solidFill>
-              <a:srgbClr val="8C3A38"/>
-            </a:solidFill>
-            <a:prstDash val="solid"/>
-          </a:ln>
-        </p:spPr>
-      </p:sp>
-      <p:sp>
-        <p:nvSpPr>
-          <p:cNvPr id="7" name="Text 4"/>
-          <p:cNvSpPr/>
-          <p:nvPr/>
-        </p:nvSpPr>
-        <p:spPr>
-          <a:xfrm>
-            <a:off x="676656" y="5541264"/>
-            <a:ext cx="8339328" cy="585216"/>
+              <a:t>The Grand Budapest Hotel (2014), dir. Wes Anderson. The concierge desk, framed dead centre.</a:t>
+            </a:r>
+            <a:endParaRPr lang="en-US" sz="950" dirty="0"/>
+          </a:p>
+        </p:txBody>
+      </p:sp>
+      <p:sp>
+        <p:nvSpPr>
+          <p:cNvPr id="8" name="Text 5"/>
+          <p:cNvSpPr/>
+          <p:nvPr/>
+        </p:nvSpPr>
+        <p:spPr>
+          <a:xfrm>
+            <a:off x="822960" y="4846320"/>
+            <a:ext cx="2361438" cy="292608"/>
+          </a:xfrm>
+          <a:prstGeom prst="rect">
+            <a:avLst/>
+          </a:prstGeom>
+          <a:noFill/>
+          <a:ln/>
+        </p:spPr>
+        <p:txBody>
+          <a:bodyPr wrap="square" lIns="0" tIns="0" rIns="0" bIns="0" rtlCol="0" anchor="ctr"/>
+          <a:lstStyle/>
+          <a:p>
+            <a:pPr indent="0" marL="0">
+              <a:buNone/>
+            </a:pPr>
+            <a:r>
+              <a:rPr lang="en-US" sz="1150" b="1" spc="120" kern="0" dirty="0">
+                <a:solidFill>
+                  <a:srgbClr val="4A6B5D"/>
+                </a:solidFill>
+                <a:latin typeface="Arial" pitchFamily="34" charset="0"/>
+                <a:ea typeface="Arial" pitchFamily="34" charset="-122"/>
+                <a:cs typeface="Arial" pitchFamily="34" charset="-120"/>
+              </a:rPr>
+              <a:t>Location</a:t>
+            </a:r>
+            <a:endParaRPr lang="en-US" sz="1150" dirty="0"/>
+          </a:p>
+        </p:txBody>
+      </p:sp>
+      <p:sp>
+        <p:nvSpPr>
+          <p:cNvPr id="9" name="Text 6"/>
+          <p:cNvSpPr/>
+          <p:nvPr/>
+        </p:nvSpPr>
+        <p:spPr>
+          <a:xfrm>
+            <a:off x="822960" y="5138928"/>
+            <a:ext cx="2361438" cy="1051560"/>
           </a:xfrm>
           <a:prstGeom prst="rect">
             <a:avLst/>
@@ -6365,12 +6474,12 @@
           <a:p>
             <a:pPr indent="0" marL="0">
               <a:lnSpc>
-                <a:spcPts val="2200"/>
+                <a:spcPts val="1700"/>
               </a:lnSpc>
               <a:buNone/>
             </a:pPr>
             <a:r>
-              <a:rPr lang="en-US" sz="1800" dirty="0">
+              <a:rPr lang="en-US" sz="1300" dirty="0">
                 <a:solidFill>
                   <a:srgbClr val="24313F"/>
                 </a:solidFill>
@@ -6378,48 +6487,252 @@
                 <a:ea typeface="Georgia" pitchFamily="34" charset="-122"/>
                 <a:cs typeface="Georgia" pitchFamily="34" charset="-120"/>
               </a:rPr>
-              <a:t>Location, costume, properties, and the two people the design refuses to centre.</a:t>
-            </a:r>
-            <a:endParaRPr lang="en-US" sz="1800" dirty="0"/>
-          </a:p>
-        </p:txBody>
-      </p:sp>
-      <p:sp>
-        <p:nvSpPr>
-          <p:cNvPr id="8" name="Text 5"/>
-          <p:cNvSpPr/>
-          <p:nvPr/>
-        </p:nvSpPr>
-        <p:spPr>
-          <a:xfrm>
-            <a:off x="676656" y="6181344"/>
-            <a:ext cx="8339328" cy="256032"/>
-          </a:xfrm>
-          <a:prstGeom prst="rect">
-            <a:avLst/>
-          </a:prstGeom>
-          <a:noFill/>
-          <a:ln/>
-        </p:spPr>
-        <p:txBody>
-          <a:bodyPr wrap="square" lIns="0" tIns="0" rIns="0" bIns="0" rtlCol="0" anchor="ctr"/>
-          <a:lstStyle/>
-          <a:p>
-            <a:pPr indent="0" marL="0">
-              <a:buNone/>
-            </a:pPr>
-            <a:r>
-              <a:rPr lang="en-US" sz="950" spc="50" kern="0" dirty="0">
-                <a:solidFill>
-                  <a:srgbClr val="7A7F72"/>
+              <a:t>A built set, not a found lobby: marble, brass keys, the desk raised like an altar.</a:t>
+            </a:r>
+            <a:endParaRPr lang="en-US" sz="1300" dirty="0"/>
+          </a:p>
+        </p:txBody>
+      </p:sp>
+      <p:sp>
+        <p:nvSpPr>
+          <p:cNvPr id="10" name="Text 7"/>
+          <p:cNvSpPr/>
+          <p:nvPr/>
+        </p:nvSpPr>
+        <p:spPr>
+          <a:xfrm>
+            <a:off x="3550158" y="4846320"/>
+            <a:ext cx="2361438" cy="292608"/>
+          </a:xfrm>
+          <a:prstGeom prst="rect">
+            <a:avLst/>
+          </a:prstGeom>
+          <a:noFill/>
+          <a:ln/>
+        </p:spPr>
+        <p:txBody>
+          <a:bodyPr wrap="square" lIns="0" tIns="0" rIns="0" bIns="0" rtlCol="0" anchor="ctr"/>
+          <a:lstStyle/>
+          <a:p>
+            <a:pPr indent="0" marL="0">
+              <a:buNone/>
+            </a:pPr>
+            <a:r>
+              <a:rPr lang="en-US" sz="1150" b="1" spc="120" kern="0" dirty="0">
+                <a:solidFill>
+                  <a:srgbClr val="4A6B5D"/>
                 </a:solidFill>
                 <a:latin typeface="Arial" pitchFamily="34" charset="0"/>
                 <a:ea typeface="Arial" pitchFamily="34" charset="-122"/>
                 <a:cs typeface="Arial" pitchFamily="34" charset="-120"/>
               </a:rPr>
-              <a:t>Pieter Bruegel the Elder, The Peasant Wedding, c. 1567</a:t>
-            </a:r>
-            <a:endParaRPr lang="en-US" sz="950" dirty="0"/>
+              <a:t>Costume</a:t>
+            </a:r>
+            <a:endParaRPr lang="en-US" sz="1150" dirty="0"/>
+          </a:p>
+        </p:txBody>
+      </p:sp>
+      <p:sp>
+        <p:nvSpPr>
+          <p:cNvPr id="11" name="Text 8"/>
+          <p:cNvSpPr/>
+          <p:nvPr/>
+        </p:nvSpPr>
+        <p:spPr>
+          <a:xfrm>
+            <a:off x="3550158" y="5138928"/>
+            <a:ext cx="2361438" cy="1051560"/>
+          </a:xfrm>
+          <a:prstGeom prst="rect">
+            <a:avLst/>
+          </a:prstGeom>
+          <a:noFill/>
+          <a:ln/>
+        </p:spPr>
+        <p:txBody>
+          <a:bodyPr wrap="square" lIns="0" tIns="0" rIns="0" bIns="0" rtlCol="0" anchor="t"/>
+          <a:lstStyle/>
+          <a:p>
+            <a:pPr indent="0" marL="0">
+              <a:lnSpc>
+                <a:spcPts val="1700"/>
+              </a:lnSpc>
+              <a:buNone/>
+            </a:pPr>
+            <a:r>
+              <a:rPr lang="en-US" sz="1300" dirty="0">
+                <a:solidFill>
+                  <a:srgbClr val="24313F"/>
+                </a:solidFill>
+                <a:latin typeface="Georgia" pitchFamily="34" charset="0"/>
+                <a:ea typeface="Georgia" pitchFamily="34" charset="-122"/>
+                <a:cs typeface="Georgia" pitchFamily="34" charset="-120"/>
+              </a:rPr>
+              <a:t>Purple livery ranks everyone at a glance. You know who works here before anyone speaks.</a:t>
+            </a:r>
+            <a:endParaRPr lang="en-US" sz="1300" dirty="0"/>
+          </a:p>
+        </p:txBody>
+      </p:sp>
+      <p:sp>
+        <p:nvSpPr>
+          <p:cNvPr id="12" name="Text 9"/>
+          <p:cNvSpPr/>
+          <p:nvPr/>
+        </p:nvSpPr>
+        <p:spPr>
+          <a:xfrm>
+            <a:off x="6277356" y="4846320"/>
+            <a:ext cx="2361438" cy="292608"/>
+          </a:xfrm>
+          <a:prstGeom prst="rect">
+            <a:avLst/>
+          </a:prstGeom>
+          <a:noFill/>
+          <a:ln/>
+        </p:spPr>
+        <p:txBody>
+          <a:bodyPr wrap="square" lIns="0" tIns="0" rIns="0" bIns="0" rtlCol="0" anchor="ctr"/>
+          <a:lstStyle/>
+          <a:p>
+            <a:pPr indent="0" marL="0">
+              <a:buNone/>
+            </a:pPr>
+            <a:r>
+              <a:rPr lang="en-US" sz="1150" b="1" spc="120" kern="0" dirty="0">
+                <a:solidFill>
+                  <a:srgbClr val="4A6B5D"/>
+                </a:solidFill>
+                <a:latin typeface="Arial" pitchFamily="34" charset="0"/>
+                <a:ea typeface="Arial" pitchFamily="34" charset="-122"/>
+                <a:cs typeface="Arial" pitchFamily="34" charset="-120"/>
+              </a:rPr>
+              <a:t>Properties</a:t>
+            </a:r>
+            <a:endParaRPr lang="en-US" sz="1150" dirty="0"/>
+          </a:p>
+        </p:txBody>
+      </p:sp>
+      <p:sp>
+        <p:nvSpPr>
+          <p:cNvPr id="13" name="Text 10"/>
+          <p:cNvSpPr/>
+          <p:nvPr/>
+        </p:nvSpPr>
+        <p:spPr>
+          <a:xfrm>
+            <a:off x="6277356" y="5138928"/>
+            <a:ext cx="2361438" cy="1051560"/>
+          </a:xfrm>
+          <a:prstGeom prst="rect">
+            <a:avLst/>
+          </a:prstGeom>
+          <a:noFill/>
+          <a:ln/>
+        </p:spPr>
+        <p:txBody>
+          <a:bodyPr wrap="square" lIns="0" tIns="0" rIns="0" bIns="0" rtlCol="0" anchor="t"/>
+          <a:lstStyle/>
+          <a:p>
+            <a:pPr indent="0" marL="0">
+              <a:lnSpc>
+                <a:spcPts val="1700"/>
+              </a:lnSpc>
+              <a:buNone/>
+            </a:pPr>
+            <a:r>
+              <a:rPr lang="en-US" sz="1300" dirty="0">
+                <a:solidFill>
+                  <a:srgbClr val="24313F"/>
+                </a:solidFill>
+                <a:latin typeface="Georgia" pitchFamily="34" charset="0"/>
+                <a:ea typeface="Georgia" pitchFamily="34" charset="-122"/>
+                <a:cs typeface="Georgia" pitchFamily="34" charset="-120"/>
+              </a:rPr>
+              <a:t>The key rack and the ledger are load-bearing: the whole plot passes through that desk.</a:t>
+            </a:r>
+            <a:endParaRPr lang="en-US" sz="1300" dirty="0"/>
+          </a:p>
+        </p:txBody>
+      </p:sp>
+      <p:sp>
+        <p:nvSpPr>
+          <p:cNvPr id="14" name="Text 11"/>
+          <p:cNvSpPr/>
+          <p:nvPr/>
+        </p:nvSpPr>
+        <p:spPr>
+          <a:xfrm>
+            <a:off x="9004554" y="4846320"/>
+            <a:ext cx="2361438" cy="292608"/>
+          </a:xfrm>
+          <a:prstGeom prst="rect">
+            <a:avLst/>
+          </a:prstGeom>
+          <a:noFill/>
+          <a:ln/>
+        </p:spPr>
+        <p:txBody>
+          <a:bodyPr wrap="square" lIns="0" tIns="0" rIns="0" bIns="0" rtlCol="0" anchor="ctr"/>
+          <a:lstStyle/>
+          <a:p>
+            <a:pPr indent="0" marL="0">
+              <a:buNone/>
+            </a:pPr>
+            <a:r>
+              <a:rPr lang="en-US" sz="1150" b="1" spc="120" kern="0" dirty="0">
+                <a:solidFill>
+                  <a:srgbClr val="4A6B5D"/>
+                </a:solidFill>
+                <a:latin typeface="Arial" pitchFamily="34" charset="0"/>
+                <a:ea typeface="Arial" pitchFamily="34" charset="-122"/>
+                <a:cs typeface="Arial" pitchFamily="34" charset="-120"/>
+              </a:rPr>
+              <a:t>Arrangement</a:t>
+            </a:r>
+            <a:endParaRPr lang="en-US" sz="1150" dirty="0"/>
+          </a:p>
+        </p:txBody>
+      </p:sp>
+      <p:sp>
+        <p:nvSpPr>
+          <p:cNvPr id="15" name="Text 12"/>
+          <p:cNvSpPr/>
+          <p:nvPr/>
+        </p:nvSpPr>
+        <p:spPr>
+          <a:xfrm>
+            <a:off x="9004554" y="5138928"/>
+            <a:ext cx="2361438" cy="1051560"/>
+          </a:xfrm>
+          <a:prstGeom prst="rect">
+            <a:avLst/>
+          </a:prstGeom>
+          <a:noFill/>
+          <a:ln/>
+        </p:spPr>
+        <p:txBody>
+          <a:bodyPr wrap="square" lIns="0" tIns="0" rIns="0" bIns="0" rtlCol="0" anchor="t"/>
+          <a:lstStyle/>
+          <a:p>
+            <a:pPr indent="0" marL="0">
+              <a:lnSpc>
+                <a:spcPts val="1700"/>
+              </a:lnSpc>
+              <a:buNone/>
+            </a:pPr>
+            <a:r>
+              <a:rPr lang="en-US" sz="1300" dirty="0">
+                <a:solidFill>
+                  <a:srgbClr val="24313F"/>
+                </a:solidFill>
+                <a:latin typeface="Georgia" pitchFamily="34" charset="0"/>
+                <a:ea typeface="Georgia" pitchFamily="34" charset="-122"/>
+                <a:cs typeface="Georgia" pitchFamily="34" charset="-120"/>
+              </a:rPr>
+              <a:t>One man dead centre, symmetrical staircases. The design crowns the concierge.</a:t>
+            </a:r>
+            <a:endParaRPr lang="en-US" sz="1300" dirty="0"/>
           </a:p>
         </p:txBody>
       </p:sp>
